--- a/public/retrieval-quiz-quiz-trade-template.pptx
+++ b/public/retrieval-quiz-quiz-trade-template.pptx
@@ -2,13 +2,13 @@
 <file path=ppt/presentation.xml><?xml version="1.0" encoding="utf-8"?>
 <p:presentation xmlns:p="http://schemas.openxmlformats.org/presentationml/2006/main">
   <p:sldMasterIdLst>
-    <p:sldMasterId xmlns:r="http://schemas.openxmlformats.org/officeDocument/2006/relationships" id="2147483648" r:id="Re86b659d69534d81"/>
+    <p:sldMasterId xmlns:r="http://schemas.openxmlformats.org/officeDocument/2006/relationships" id="2147483648" r:id="R8d8f8684c324425d"/>
   </p:sldMasterIdLst>
   <p:notesMasterIdLst>
-    <p:notesMasterId xmlns:r="http://schemas.openxmlformats.org/officeDocument/2006/relationships" r:id="R6c20a672daa14a19"/>
+    <p:notesMasterId xmlns:r="http://schemas.openxmlformats.org/officeDocument/2006/relationships" r:id="R098ac5c72b674177"/>
   </p:notesMasterIdLst>
   <p:sldIdLst>
-    <p:sldId xmlns:r="http://schemas.openxmlformats.org/officeDocument/2006/relationships" id="256" r:id="R4b5b5de9be8642c2"/>
+    <p:sldId xmlns:r="http://schemas.openxmlformats.org/officeDocument/2006/relationships" id="256" r:id="R97acfed8e51c4f8c"/>
   </p:sldIdLst>
   <p:sldSz cx="12192000" cy="6858000"/>
   <p:notesSz cx="6858000" cy="9144000"/>
@@ -442,7 +442,7 @@
           <a:lstStyle xmlns:a="http://schemas.openxmlformats.org/drawingml/2006/main"/>
           <a:p xmlns:a="http://schemas.openxmlformats.org/drawingml/2006/main">
             <a:r>
-              <a:t>Teacher setup: Replace bracketed text before teaching. Every text box is editable. Duplicate the slide for checked answers or a second prompt. Keep prompt and answer sides separate when printing cards.</a:t>
+              <a:t>Teacher setup: Replace bracketed text before teaching. All text and shapes are editable. Duplicate the slide for answers or another prompt. For card activities, separate prompt and answer sides before printing.</a:t>
             </a:r>
           </a:p>
           <a:p xmlns:a="http://schemas.openxmlformats.org/drawingml/2006/main">
@@ -452,17 +452,12 @@
           </a:p>
           <a:p xmlns:a="http://schemas.openxmlformats.org/drawingml/2006/main">
             <a:r>
-              <a:t>Activity: Quiz–Quiz–Trade</a:t>
-            </a:r>
-          </a:p>
-          <a:p xmlns:a="http://schemas.openxmlformats.org/drawingml/2006/main">
-            <a:r>
               <a:t>Materials: Teacher-checked prompt cards with answers on the back</a:t>
             </a:r>
           </a:p>
           <a:p xmlns:a="http://schemas.openxmlformats.org/drawingml/2006/main">
             <a:r>
-              <a:t>Suggested total time including feedback: 10 minutes.</a:t>
+              <a:t>Suggested time including feedback: 10 minutes.</a:t>
             </a:r>
           </a:p>
           <a:p xmlns:a="http://schemas.openxmlformats.org/drawingml/2006/main">
@@ -505,26 +500,6 @@
               <a:t>Adapt: Offer a seated rotation and read prompts aloud where helpful.</a:t>
             </a:r>
           </a:p>
-          <a:p xmlns:a="http://schemas.openxmlformats.org/drawingml/2006/main">
-            <a:r>
-              <a:t>Credit: Kagan — cooperative learning structure</a:t>
-            </a:r>
-          </a:p>
-          <a:p xmlns:a="http://schemas.openxmlformats.org/drawingml/2006/main">
-            <a:r>
-              <a:t>Quiz–Quiz–Trade is a Kagan structure. This is an independently written retrieval guide; no Kagan card sets or artwork are reproduced.</a:t>
-            </a:r>
-          </a:p>
-          <a:p xmlns:a="http://schemas.openxmlformats.org/drawingml/2006/main">
-            <a:r>
-              <a:t>Source: https://www.kaganonline.com/catalog/look_whats_inside/BQQV_inside.php</a:t>
-            </a:r>
-          </a:p>
-          <a:p xmlns:a="http://schemas.openxmlformats.org/drawingml/2006/main">
-            <a:r>
-              <a:t>Full guide: https://tnt-teaching-tools.github.io/cold-call-classroom/retrieval-quiz-quiz-trade.html</a:t>
-            </a:r>
-          </a:p>
         </p:txBody>
       </p:sp>
       <p:sp>
@@ -569,7 +544,7 @@
           <p:cNvPr id="4" name="Accent rule">
             <a:extLst xmlns:a="http://schemas.openxmlformats.org/drawingml/2006/main">
               <a:ext uri="{FF2B5EF4-FFF2-40B4-BE49-F238E27FC236}">
-                <a16:creationId xmlns:a16="http://schemas.microsoft.com/office/drawing/2014/main" id="{2FE1A267-32CF-428C-9D88-4D8B190A6D71}"/>
+                <a16:creationId xmlns:a16="http://schemas.microsoft.com/office/drawing/2014/main" id="{E7AB25BE-AB19-45F9-ADB1-21B8C558EE41}"/>
               </a:ext>
             </a:extLst>
           </p:cNvPr>
@@ -600,7 +575,7 @@
           <p:cNvPr id="2" name="Title">
             <a:extLst xmlns:a="http://schemas.openxmlformats.org/drawingml/2006/main">
               <a:ext uri="{FF2B5EF4-FFF2-40B4-BE49-F238E27FC236}">
-                <a16:creationId xmlns:a16="http://schemas.microsoft.com/office/drawing/2014/main" id="{CB37816E-BA94-47A4-939B-4814501BA250}"/>
+                <a16:creationId xmlns:a16="http://schemas.microsoft.com/office/drawing/2014/main" id="{88C1EFAC-830A-4B9E-A769-D587A68C5C79}"/>
               </a:ext>
             </a:extLst>
           </p:cNvPr>
@@ -747,7 +722,7 @@
           <p:cNvPr id="3" name="Subtitle">
             <a:extLst xmlns:a="http://schemas.openxmlformats.org/drawingml/2006/main">
               <a:ext uri="{FF2B5EF4-FFF2-40B4-BE49-F238E27FC236}">
-                <a16:creationId xmlns:a16="http://schemas.microsoft.com/office/drawing/2014/main" id="{57CFAFF0-1D6F-4272-9097-A463819CC605}"/>
+                <a16:creationId xmlns:a16="http://schemas.microsoft.com/office/drawing/2014/main" id="{3BE31983-D39F-4C73-969D-639670543D3B}"/>
               </a:ext>
             </a:extLst>
           </p:cNvPr>
@@ -911,7 +886,7 @@
           <p:cNvPr id="3" name="Accent rule">
             <a:extLst xmlns:a="http://schemas.openxmlformats.org/drawingml/2006/main">
               <a:ext uri="{FF2B5EF4-FFF2-40B4-BE49-F238E27FC236}">
-                <a16:creationId xmlns:a16="http://schemas.microsoft.com/office/drawing/2014/main" id="{AE10A43E-A518-46CD-9AFD-418DE9C8E465}"/>
+                <a16:creationId xmlns:a16="http://schemas.microsoft.com/office/drawing/2014/main" id="{33A1475A-9950-43D4-B804-CB28FC2F11DC}"/>
               </a:ext>
             </a:extLst>
           </p:cNvPr>
@@ -942,7 +917,7 @@
           <p:cNvPr id="2" name="Section title">
             <a:extLst xmlns:a="http://schemas.openxmlformats.org/drawingml/2006/main">
               <a:ext uri="{FF2B5EF4-FFF2-40B4-BE49-F238E27FC236}">
-                <a16:creationId xmlns:a16="http://schemas.microsoft.com/office/drawing/2014/main" id="{35F0F1DB-E15E-4A83-ADEB-DBF243875A2E}"/>
+                <a16:creationId xmlns:a16="http://schemas.microsoft.com/office/drawing/2014/main" id="{DFA19428-23DD-41B1-B1E4-C3CD6A869E08}"/>
               </a:ext>
             </a:extLst>
           </p:cNvPr>
@@ -1106,7 +1081,7 @@
           <p:cNvPr id="4" name="Accent rule">
             <a:extLst xmlns:a="http://schemas.openxmlformats.org/drawingml/2006/main">
               <a:ext uri="{FF2B5EF4-FFF2-40B4-BE49-F238E27FC236}">
-                <a16:creationId xmlns:a16="http://schemas.microsoft.com/office/drawing/2014/main" id="{427DE562-D114-495B-8552-7FBA978F82F3}"/>
+                <a16:creationId xmlns:a16="http://schemas.microsoft.com/office/drawing/2014/main" id="{AE866F35-63B2-41F6-BF9C-28A7888AFEBD}"/>
               </a:ext>
             </a:extLst>
           </p:cNvPr>
@@ -1137,7 +1112,7 @@
           <p:cNvPr id="2" name="Title">
             <a:extLst xmlns:a="http://schemas.openxmlformats.org/drawingml/2006/main">
               <a:ext uri="{FF2B5EF4-FFF2-40B4-BE49-F238E27FC236}">
-                <a16:creationId xmlns:a16="http://schemas.microsoft.com/office/drawing/2014/main" id="{06309AD2-E6CF-476B-A4F2-3BE1DFE06F03}"/>
+                <a16:creationId xmlns:a16="http://schemas.microsoft.com/office/drawing/2014/main" id="{653D1995-9A3F-4122-AD52-E3332F766419}"/>
               </a:ext>
             </a:extLst>
           </p:cNvPr>
@@ -1284,7 +1259,7 @@
           <p:cNvPr id="3" name="Body">
             <a:extLst xmlns:a="http://schemas.openxmlformats.org/drawingml/2006/main">
               <a:ext uri="{FF2B5EF4-FFF2-40B4-BE49-F238E27FC236}">
-                <a16:creationId xmlns:a16="http://schemas.microsoft.com/office/drawing/2014/main" id="{5FDFBB26-B595-4D82-A32D-90F4715A3E57}"/>
+                <a16:creationId xmlns:a16="http://schemas.microsoft.com/office/drawing/2014/main" id="{1877C377-1CE4-480F-AF22-00A2E27AFEE9}"/>
               </a:ext>
             </a:extLst>
           </p:cNvPr>
@@ -1448,7 +1423,7 @@
           <p:cNvPr id="5" name="Accent rule">
             <a:extLst xmlns:a="http://schemas.openxmlformats.org/drawingml/2006/main">
               <a:ext uri="{FF2B5EF4-FFF2-40B4-BE49-F238E27FC236}">
-                <a16:creationId xmlns:a16="http://schemas.microsoft.com/office/drawing/2014/main" id="{EF66BF54-9EC5-4775-AB38-87D1698193F6}"/>
+                <a16:creationId xmlns:a16="http://schemas.microsoft.com/office/drawing/2014/main" id="{012EA409-338C-4793-BA7D-F459D72D8A21}"/>
               </a:ext>
             </a:extLst>
           </p:cNvPr>
@@ -1479,7 +1454,7 @@
           <p:cNvPr id="2" name="Title">
             <a:extLst xmlns:a="http://schemas.openxmlformats.org/drawingml/2006/main">
               <a:ext uri="{FF2B5EF4-FFF2-40B4-BE49-F238E27FC236}">
-                <a16:creationId xmlns:a16="http://schemas.microsoft.com/office/drawing/2014/main" id="{0E0891B9-80A0-40D1-8C0D-CD2B25ED4281}"/>
+                <a16:creationId xmlns:a16="http://schemas.microsoft.com/office/drawing/2014/main" id="{35CB68D7-0FD3-427C-9859-CE93D94AD3B0}"/>
               </a:ext>
             </a:extLst>
           </p:cNvPr>
@@ -1626,7 +1601,7 @@
           <p:cNvPr id="3" name="Left column">
             <a:extLst xmlns:a="http://schemas.openxmlformats.org/drawingml/2006/main">
               <a:ext uri="{FF2B5EF4-FFF2-40B4-BE49-F238E27FC236}">
-                <a16:creationId xmlns:a16="http://schemas.microsoft.com/office/drawing/2014/main" id="{D7B30EEC-E0F8-40CE-AF52-5E81BD50DA5B}"/>
+                <a16:creationId xmlns:a16="http://schemas.microsoft.com/office/drawing/2014/main" id="{FA3ECD73-6466-4EE4-BE10-B1AF5B7753E2}"/>
               </a:ext>
             </a:extLst>
           </p:cNvPr>
@@ -1773,7 +1748,7 @@
           <p:cNvPr id="4" name="Right column">
             <a:extLst xmlns:a="http://schemas.openxmlformats.org/drawingml/2006/main">
               <a:ext uri="{FF2B5EF4-FFF2-40B4-BE49-F238E27FC236}">
-                <a16:creationId xmlns:a16="http://schemas.microsoft.com/office/drawing/2014/main" id="{2F592C56-6B19-4E85-AD37-AD361757509D}"/>
+                <a16:creationId xmlns:a16="http://schemas.microsoft.com/office/drawing/2014/main" id="{CABEA542-A1F4-462A-BCD1-C7355A426289}"/>
               </a:ext>
             </a:extLst>
           </p:cNvPr>
@@ -1937,7 +1912,7 @@
           <p:cNvPr id="4" name="Accent rule">
             <a:extLst xmlns:a="http://schemas.openxmlformats.org/drawingml/2006/main">
               <a:ext uri="{FF2B5EF4-FFF2-40B4-BE49-F238E27FC236}">
-                <a16:creationId xmlns:a16="http://schemas.microsoft.com/office/drawing/2014/main" id="{F0C63EEC-0751-46E5-9F56-B530B883E7A3}"/>
+                <a16:creationId xmlns:a16="http://schemas.microsoft.com/office/drawing/2014/main" id="{599640FC-AA7E-470F-A821-CAF549D3214D}"/>
               </a:ext>
             </a:extLst>
           </p:cNvPr>
@@ -1968,7 +1943,7 @@
           <p:cNvPr id="2" name="Title">
             <a:extLst xmlns:a="http://schemas.openxmlformats.org/drawingml/2006/main">
               <a:ext uri="{FF2B5EF4-FFF2-40B4-BE49-F238E27FC236}">
-                <a16:creationId xmlns:a16="http://schemas.microsoft.com/office/drawing/2014/main" id="{0D884A34-5430-45BD-94DF-037718A12B66}"/>
+                <a16:creationId xmlns:a16="http://schemas.microsoft.com/office/drawing/2014/main" id="{5727E8AB-B1FF-4FF5-BE3F-8525D9D816C9}"/>
               </a:ext>
             </a:extLst>
           </p:cNvPr>
@@ -2115,7 +2090,7 @@
           <p:cNvPr id="3" name="Left column">
             <a:extLst xmlns:a="http://schemas.openxmlformats.org/drawingml/2006/main">
               <a:ext uri="{FF2B5EF4-FFF2-40B4-BE49-F238E27FC236}">
-                <a16:creationId xmlns:a16="http://schemas.microsoft.com/office/drawing/2014/main" id="{018072F9-8E49-4C92-BD5C-A92834388EBD}"/>
+                <a16:creationId xmlns:a16="http://schemas.microsoft.com/office/drawing/2014/main" id="{C29F7252-8E22-492D-A5EA-8322AE9AFF24}"/>
               </a:ext>
             </a:extLst>
           </p:cNvPr>
@@ -2300,12 +2275,12 @@
   </p:cSld>
   <p:clrMap bg1="lt1" tx1="dk1" bg2="lt2" tx2="dk2" accent1="accent1" accent2="accent2" accent3="accent3" accent4="accent4" accent5="accent5" accent6="accent6" hlink="hlink" folHlink="folHlink"/>
   <p:sldLayoutIdLst>
-    <p:sldLayoutId xmlns:r="http://schemas.openxmlformats.org/officeDocument/2006/relationships" id="2147483649" r:id="Re4b215e64b56425b"/>
-    <p:sldLayoutId xmlns:r="http://schemas.openxmlformats.org/officeDocument/2006/relationships" id="2147483650" r:id="Rf0bb9230d1a6488e"/>
-    <p:sldLayoutId xmlns:r="http://schemas.openxmlformats.org/officeDocument/2006/relationships" id="2147483651" r:id="R6fbd4689c89f4035"/>
-    <p:sldLayoutId xmlns:r="http://schemas.openxmlformats.org/officeDocument/2006/relationships" id="2147483652" r:id="R5d94e35f12014b25"/>
-    <p:sldLayoutId xmlns:r="http://schemas.openxmlformats.org/officeDocument/2006/relationships" id="2147483653" r:id="R5ddd6c1413284b28"/>
-    <p:sldLayoutId xmlns:r="http://schemas.openxmlformats.org/officeDocument/2006/relationships" id="2147483654" r:id="R91b7cecccce748e9"/>
+    <p:sldLayoutId xmlns:r="http://schemas.openxmlformats.org/officeDocument/2006/relationships" id="2147483649" r:id="R4d41baae9b9b440a"/>
+    <p:sldLayoutId xmlns:r="http://schemas.openxmlformats.org/officeDocument/2006/relationships" id="2147483650" r:id="R9f81194b98334b98"/>
+    <p:sldLayoutId xmlns:r="http://schemas.openxmlformats.org/officeDocument/2006/relationships" id="2147483651" r:id="Rb7b7f33d61ef4120"/>
+    <p:sldLayoutId xmlns:r="http://schemas.openxmlformats.org/officeDocument/2006/relationships" id="2147483652" r:id="R048e72609dfc418c"/>
+    <p:sldLayoutId xmlns:r="http://schemas.openxmlformats.org/officeDocument/2006/relationships" id="2147483653" r:id="Rb20b02e7ddd141b2"/>
+    <p:sldLayoutId xmlns:r="http://schemas.openxmlformats.org/officeDocument/2006/relationships" id="2147483654" r:id="Rff84081b84954595"/>
   </p:sldLayoutIdLst>
   <p:txStyles>
     <p:titleStyle>
@@ -2838,7 +2813,7 @@
     <p:bg>
       <p:bgPr>
         <a:solidFill xmlns:a="http://schemas.openxmlformats.org/drawingml/2006/main">
-          <a:srgbClr val="FFFCF2"/>
+          <a:srgbClr val="FFFDF5"/>
         </a:solidFill>
       </p:bgPr>
     </p:bg>
@@ -2853,10 +2828,10 @@
       </p:grpSpPr>
       <p:sp>
         <p:nvSpPr>
-          <p:cNvPr id="8" name="">
+          <p:cNvPr id="19" name="">
             <a:extLst xmlns:a="http://schemas.openxmlformats.org/drawingml/2006/main">
               <a:ext uri="{FF2B5EF4-FFF2-40B4-BE49-F238E27FC236}">
-                <a16:creationId xmlns:a16="http://schemas.microsoft.com/office/drawing/2014/main" id="{BE711732-C684-499A-85DE-128AFAEDE4D7}"/>
+                <a16:creationId xmlns:a16="http://schemas.microsoft.com/office/drawing/2014/main" id="{2E55D0E5-845D-4765-AEF2-2CD35B265F50}"/>
               </a:ext>
             </a:extLst>
           </p:cNvPr>
@@ -2867,8 +2842,8 @@
         </p:nvSpPr>
         <p:spPr>
           <a:xfrm xmlns:a="http://schemas.openxmlformats.org/drawingml/2006/main">
-            <a:off x="609600" y="333375"/>
-            <a:ext cx="10972800" cy="714375"/>
+            <a:off x="609600" y="323850"/>
+            <a:ext cx="10972800" cy="666750"/>
           </a:xfrm>
           <a:prstGeom xmlns:a="http://schemas.openxmlformats.org/drawingml/2006/main" prst="rect">
             <a:avLst/>
@@ -2885,23 +2860,23 @@
           <a:lstStyle xmlns:a="http://schemas.openxmlformats.org/drawingml/2006/main"/>
           <a:p xmlns:a="http://schemas.openxmlformats.org/drawingml/2006/main">
             <a:pPr>
-              <a:defRPr sz="4050" b="1">
+              <a:defRPr sz="3450" b="1">
                 <a:solidFill>
-                  <a:srgbClr val="242720"/>
+                  <a:srgbClr val="263C3A"/>
                 </a:solidFill>
-                <a:latin typeface="Arial"/>
-                <a:ea typeface="Arial"/>
-                <a:cs typeface="Arial"/>
+                <a:latin typeface="DejaVu Sans"/>
+                <a:ea typeface="DejaVu Sans"/>
+                <a:cs typeface="DejaVu Sans"/>
               </a:defRPr>
             </a:pPr>
             <a:r>
-              <a:rPr sz="4050" b="1">
+              <a:rPr sz="3450" b="1">
                 <a:solidFill>
-                  <a:srgbClr val="242720"/>
+                  <a:srgbClr val="263C3A"/>
                 </a:solidFill>
-                <a:latin typeface="Arial"/>
-                <a:ea typeface="Arial"/>
-                <a:cs typeface="Arial"/>
+                <a:latin typeface="DejaVu Sans"/>
+                <a:ea typeface="DejaVu Sans"/>
+                <a:cs typeface="DejaVu Sans"/>
               </a:rPr>
               <a:t>Quiz–Quiz–Trade</a:t>
             </a:r>
@@ -2913,7 +2888,7 @@
           <p:cNvPr id="2" name="">
             <a:extLst xmlns:a="http://schemas.openxmlformats.org/drawingml/2006/main">
               <a:ext uri="{FF2B5EF4-FFF2-40B4-BE49-F238E27FC236}">
-                <a16:creationId xmlns:a16="http://schemas.microsoft.com/office/drawing/2014/main" id="{16E4E911-1174-4830-9FEA-2938CC66EB62}"/>
+                <a16:creationId xmlns:a16="http://schemas.microsoft.com/office/drawing/2014/main" id="{8BB8BE7A-AE02-490F-87FB-5235BCCE1C91}"/>
               </a:ext>
             </a:extLst>
           </p:cNvPr>
@@ -2924,8 +2899,8 @@
         </p:nvSpPr>
         <p:spPr>
           <a:xfrm xmlns:a="http://schemas.openxmlformats.org/drawingml/2006/main">
-            <a:off x="609600" y="1190625"/>
-            <a:ext cx="10972800" cy="476250"/>
+            <a:off x="609600" y="1085850"/>
+            <a:ext cx="10972800" cy="409575"/>
           </a:xfrm>
           <a:prstGeom xmlns:a="http://schemas.openxmlformats.org/drawingml/2006/main" prst="rect">
             <a:avLst/>
@@ -2942,25 +2917,25 @@
           <a:lstStyle xmlns:a="http://schemas.openxmlformats.org/drawingml/2006/main"/>
           <a:p xmlns:a="http://schemas.openxmlformats.org/drawingml/2006/main">
             <a:pPr>
-              <a:defRPr sz="2400" b="0">
+              <a:defRPr sz="2175" b="0">
                 <a:solidFill>
-                  <a:srgbClr val="242720"/>
+                  <a:srgbClr val="687572"/>
                 </a:solidFill>
-                <a:latin typeface="Arial"/>
-                <a:ea typeface="Arial"/>
-                <a:cs typeface="Arial"/>
+                <a:latin typeface="DejaVu Sans"/>
+                <a:ea typeface="DejaVu Sans"/>
+                <a:cs typeface="DejaVu Sans"/>
               </a:defRPr>
             </a:pPr>
             <a:r>
-              <a:rPr sz="2400" b="0">
+              <a:rPr sz="2175" b="0">
                 <a:solidFill>
-                  <a:srgbClr val="242720"/>
+                  <a:srgbClr val="687572"/>
                 </a:solidFill>
-                <a:latin typeface="Arial"/>
-                <a:ea typeface="Arial"/>
-                <a:cs typeface="Arial"/>
+                <a:latin typeface="DejaVu Sans"/>
+                <a:ea typeface="DejaVu Sans"/>
+                <a:cs typeface="DejaVu Sans"/>
               </a:rPr>
-              <a:t>[Add your topic or retrieval focus]</a:t>
+              <a:t>[Your topic or retrieval focus]</a:t>
             </a:r>
           </a:p>
         </p:txBody>
@@ -2970,7 +2945,7 @@
           <p:cNvPr id="3" name="">
             <a:extLst xmlns:a="http://schemas.openxmlformats.org/drawingml/2006/main">
               <a:ext uri="{FF2B5EF4-FFF2-40B4-BE49-F238E27FC236}">
-                <a16:creationId xmlns:a16="http://schemas.microsoft.com/office/drawing/2014/main" id="{418F9658-B533-4B75-8A6D-907558344CB0}"/>
+                <a16:creationId xmlns:a16="http://schemas.microsoft.com/office/drawing/2014/main" id="{B0D3853C-12C7-4F36-8922-436CC149486E}"/>
               </a:ext>
             </a:extLst>
           </p:cNvPr>
@@ -2981,8 +2956,38 @@
         </p:nvSpPr>
         <p:spPr>
           <a:xfrm xmlns:a="http://schemas.openxmlformats.org/drawingml/2006/main">
-            <a:off x="609600" y="1733550"/>
-            <a:ext cx="10972800" cy="400050"/>
+            <a:off x="609600" y="1676400"/>
+            <a:ext cx="10972800" cy="19050"/>
+          </a:xfrm>
+          <a:prstGeom xmlns:a="http://schemas.openxmlformats.org/drawingml/2006/main" prst="rect">
+            <a:avLst/>
+          </a:prstGeom>
+          <a:solidFill xmlns:a="http://schemas.openxmlformats.org/drawingml/2006/main">
+            <a:srgbClr val="A9BDB7"/>
+          </a:solidFill>
+          <a:ln xmlns:a="http://schemas.openxmlformats.org/drawingml/2006/main" w="0">
+            <a:noFill/>
+          </a:ln>
+        </p:spPr>
+      </p:sp>
+      <p:sp>
+        <p:nvSpPr>
+          <p:cNvPr id="4" name="">
+            <a:extLst xmlns:a="http://schemas.openxmlformats.org/drawingml/2006/main">
+              <a:ext uri="{FF2B5EF4-FFF2-40B4-BE49-F238E27FC236}">
+                <a16:creationId xmlns:a16="http://schemas.microsoft.com/office/drawing/2014/main" id="{F2668192-1CB0-4D4C-A2AA-9ED10BFC76C7}"/>
+              </a:ext>
+            </a:extLst>
+          </p:cNvPr>
+          <p:cNvSpPr>
+            <a:spLocks xmlns:a="http://schemas.openxmlformats.org/drawingml/2006/main" noGrp="1"/>
+          </p:cNvSpPr>
+          <p:nvPr/>
+        </p:nvSpPr>
+        <p:spPr>
+          <a:xfrm xmlns:a="http://schemas.openxmlformats.org/drawingml/2006/main">
+            <a:off x="609600" y="1828800"/>
+            <a:ext cx="4476750" cy="304800"/>
           </a:xfrm>
           <a:prstGeom xmlns:a="http://schemas.openxmlformats.org/drawingml/2006/main" prst="rect">
             <a:avLst/>
@@ -2999,35 +3004,35 @@
           <a:lstStyle xmlns:a="http://schemas.openxmlformats.org/drawingml/2006/main"/>
           <a:p xmlns:a="http://schemas.openxmlformats.org/drawingml/2006/main">
             <a:pPr>
-              <a:defRPr sz="1800" b="0">
+              <a:defRPr sz="1575" b="1">
                 <a:solidFill>
-                  <a:srgbClr val="28534A"/>
+                  <a:srgbClr val="263C3A"/>
                 </a:solidFill>
-                <a:latin typeface="Arial"/>
-                <a:ea typeface="Arial"/>
-                <a:cs typeface="Arial"/>
+                <a:latin typeface="DejaVu Sans"/>
+                <a:ea typeface="DejaVu Sans"/>
+                <a:cs typeface="DejaVu Sans"/>
               </a:defRPr>
             </a:pPr>
             <a:r>
-              <a:rPr sz="1800" b="0">
+              <a:rPr sz="1575" b="1">
                 <a:solidFill>
-                  <a:srgbClr val="28534A"/>
+                  <a:srgbClr val="263C3A"/>
                 </a:solidFill>
-                <a:latin typeface="Arial"/>
-                <a:ea typeface="Arial"/>
-                <a:cs typeface="Arial"/>
+                <a:latin typeface="DejaVu Sans"/>
+                <a:ea typeface="DejaVu Sans"/>
+                <a:cs typeface="DejaVu Sans"/>
               </a:rPr>
-              <a:t>Recall independently first. Check and improve after feedback.</a:t>
+              <a:t>01  Recall from memory</a:t>
             </a:r>
           </a:p>
         </p:txBody>
       </p:sp>
       <p:sp>
         <p:nvSpPr>
-          <p:cNvPr id="4" name="">
+          <p:cNvPr id="5" name="">
             <a:extLst xmlns:a="http://schemas.openxmlformats.org/drawingml/2006/main">
               <a:ext uri="{FF2B5EF4-FFF2-40B4-BE49-F238E27FC236}">
-                <a16:creationId xmlns:a16="http://schemas.microsoft.com/office/drawing/2014/main" id="{C75ACB4A-8C18-4782-B97E-480DA858DAC1}"/>
+                <a16:creationId xmlns:a16="http://schemas.microsoft.com/office/drawing/2014/main" id="{FF45B8DC-FB6A-4FE3-B928-982E81EFA5D7}"/>
               </a:ext>
             </a:extLst>
           </p:cNvPr>
@@ -3038,182 +3043,8 @@
         </p:nvSpPr>
         <p:spPr>
           <a:xfrm xmlns:a="http://schemas.openxmlformats.org/drawingml/2006/main">
-            <a:off x="609600" y="2190750"/>
-            <a:ext cx="5400675" cy="3333750"/>
-          </a:xfrm>
-          <a:prstGeom xmlns:a="http://schemas.openxmlformats.org/drawingml/2006/main" prst="rect">
-            <a:avLst/>
-          </a:prstGeom>
-          <a:noFill xmlns:a="http://schemas.openxmlformats.org/drawingml/2006/main"/>
-          <a:ln xmlns:a="http://schemas.openxmlformats.org/drawingml/2006/main" w="9525">
-            <a:solidFill>
-              <a:srgbClr val="CBD0C4"/>
-            </a:solidFill>
-          </a:ln>
-        </p:spPr>
-        <p:txBody>
-          <a:bodyPr xmlns:a="http://schemas.openxmlformats.org/drawingml/2006/main" lIns="142875" tIns="114300" rIns="142875" bIns="0" anchor="t">
-            <a:noAutofit/>
-          </a:bodyPr>
-          <a:lstStyle xmlns:a="http://schemas.openxmlformats.org/drawingml/2006/main"/>
-          <a:p xmlns:a="http://schemas.openxmlformats.org/drawingml/2006/main">
-            <a:pPr>
-              <a:defRPr sz="1950" b="0">
-                <a:solidFill>
-                  <a:srgbClr val="42473D"/>
-                </a:solidFill>
-                <a:latin typeface="Arial"/>
-                <a:ea typeface="Arial"/>
-                <a:cs typeface="Arial"/>
-              </a:defRPr>
-            </a:pPr>
-            <a:r>
-              <a:rPr sz="1950" b="0">
-                <a:solidFill>
-                  <a:srgbClr val="42473D"/>
-                </a:solidFill>
-                <a:latin typeface="Arial"/>
-                <a:ea typeface="Arial"/>
-                <a:cs typeface="Arial"/>
-              </a:rPr>
-              <a:t>[Prompt or card front]</a:t>
-            </a:r>
-          </a:p>
-          <a:p xmlns:a="http://schemas.openxmlformats.org/drawingml/2006/main">
-            <a:r>
-              <a:t/>
-            </a:r>
-          </a:p>
-          <a:p xmlns:a="http://schemas.openxmlformats.org/drawingml/2006/main">
-            <a:pPr>
-              <a:defRPr sz="1950" b="0">
-                <a:solidFill>
-                  <a:srgbClr val="42473D"/>
-                </a:solidFill>
-                <a:latin typeface="Arial"/>
-                <a:ea typeface="Arial"/>
-                <a:cs typeface="Arial"/>
-              </a:defRPr>
-            </a:pPr>
-            <a:r>
-              <a:rPr sz="1950" b="0">
-                <a:solidFill>
-                  <a:srgbClr val="42473D"/>
-                </a:solidFill>
-                <a:latin typeface="Arial"/>
-                <a:ea typeface="Arial"/>
-                <a:cs typeface="Arial"/>
-              </a:rPr>
-              <a:t>[Add your own prompt]</a:t>
-            </a:r>
-          </a:p>
-        </p:txBody>
-      </p:sp>
-      <p:sp>
-        <p:nvSpPr>
-          <p:cNvPr id="5" name="">
-            <a:extLst xmlns:a="http://schemas.openxmlformats.org/drawingml/2006/main">
-              <a:ext uri="{FF2B5EF4-FFF2-40B4-BE49-F238E27FC236}">
-                <a16:creationId xmlns:a16="http://schemas.microsoft.com/office/drawing/2014/main" id="{470D7D5F-6B42-4DF9-B2FD-880946E9B0BB}"/>
-              </a:ext>
-            </a:extLst>
-          </p:cNvPr>
-          <p:cNvSpPr>
-            <a:spLocks xmlns:a="http://schemas.openxmlformats.org/drawingml/2006/main" noGrp="1"/>
-          </p:cNvSpPr>
-          <p:nvPr/>
-        </p:nvSpPr>
-        <p:spPr>
-          <a:xfrm xmlns:a="http://schemas.openxmlformats.org/drawingml/2006/main">
-            <a:off x="6181725" y="2190750"/>
-            <a:ext cx="5400675" cy="3333750"/>
-          </a:xfrm>
-          <a:prstGeom xmlns:a="http://schemas.openxmlformats.org/drawingml/2006/main" prst="rect">
-            <a:avLst/>
-          </a:prstGeom>
-          <a:noFill xmlns:a="http://schemas.openxmlformats.org/drawingml/2006/main"/>
-          <a:ln xmlns:a="http://schemas.openxmlformats.org/drawingml/2006/main" w="9525">
-            <a:solidFill>
-              <a:srgbClr val="CBD0C4"/>
-            </a:solidFill>
-          </a:ln>
-        </p:spPr>
-        <p:txBody>
-          <a:bodyPr xmlns:a="http://schemas.openxmlformats.org/drawingml/2006/main" lIns="142875" tIns="114300" rIns="142875" bIns="0" anchor="t">
-            <a:noAutofit/>
-          </a:bodyPr>
-          <a:lstStyle xmlns:a="http://schemas.openxmlformats.org/drawingml/2006/main"/>
-          <a:p xmlns:a="http://schemas.openxmlformats.org/drawingml/2006/main">
-            <a:pPr>
-              <a:defRPr sz="1950" b="0">
-                <a:solidFill>
-                  <a:srgbClr val="42473D"/>
-                </a:solidFill>
-                <a:latin typeface="Arial"/>
-                <a:ea typeface="Arial"/>
-                <a:cs typeface="Arial"/>
-              </a:defRPr>
-            </a:pPr>
-            <a:r>
-              <a:rPr sz="1950" b="0">
-                <a:solidFill>
-                  <a:srgbClr val="42473D"/>
-                </a:solidFill>
-                <a:latin typeface="Arial"/>
-                <a:ea typeface="Arial"/>
-                <a:cs typeface="Arial"/>
-              </a:rPr>
-              <a:t>[Checked answer or card back]</a:t>
-            </a:r>
-          </a:p>
-          <a:p xmlns:a="http://schemas.openxmlformats.org/drawingml/2006/main">
-            <a:r>
-              <a:t/>
-            </a:r>
-          </a:p>
-          <a:p xmlns:a="http://schemas.openxmlformats.org/drawingml/2006/main">
-            <a:pPr>
-              <a:defRPr sz="1950" b="0">
-                <a:solidFill>
-                  <a:srgbClr val="42473D"/>
-                </a:solidFill>
-                <a:latin typeface="Arial"/>
-                <a:ea typeface="Arial"/>
-                <a:cs typeface="Arial"/>
-              </a:defRPr>
-            </a:pPr>
-            <a:r>
-              <a:rPr sz="1950" b="0">
-                <a:solidFill>
-                  <a:srgbClr val="42473D"/>
-                </a:solidFill>
-                <a:latin typeface="Arial"/>
-                <a:ea typeface="Arial"/>
-                <a:cs typeface="Arial"/>
-              </a:rPr>
-              <a:t>[Add the answer and explanation]</a:t>
-            </a:r>
-          </a:p>
-        </p:txBody>
-      </p:sp>
-      <p:sp>
-        <p:nvSpPr>
-          <p:cNvPr id="6" name="">
-            <a:extLst xmlns:a="http://schemas.openxmlformats.org/drawingml/2006/main">
-              <a:ext uri="{FF2B5EF4-FFF2-40B4-BE49-F238E27FC236}">
-                <a16:creationId xmlns:a16="http://schemas.microsoft.com/office/drawing/2014/main" id="{3A6A803B-331D-485E-B070-D00928494C1B}"/>
-              </a:ext>
-            </a:extLst>
-          </p:cNvPr>
-          <p:cNvSpPr>
-            <a:spLocks xmlns:a="http://schemas.openxmlformats.org/drawingml/2006/main" noGrp="1"/>
-          </p:cNvSpPr>
-          <p:nvPr/>
-        </p:nvSpPr>
-        <p:spPr>
-          <a:xfrm xmlns:a="http://schemas.openxmlformats.org/drawingml/2006/main">
-            <a:off x="609600" y="5953125"/>
-            <a:ext cx="10972800" cy="381000"/>
+            <a:off x="6286500" y="1828800"/>
+            <a:ext cx="5048250" cy="304800"/>
           </a:xfrm>
           <a:prstGeom xmlns:a="http://schemas.openxmlformats.org/drawingml/2006/main" prst="rect">
             <a:avLst/>
@@ -3230,35 +3061,35 @@
           <a:lstStyle xmlns:a="http://schemas.openxmlformats.org/drawingml/2006/main"/>
           <a:p xmlns:a="http://schemas.openxmlformats.org/drawingml/2006/main">
             <a:pPr>
-              <a:defRPr sz="1800" b="0">
+              <a:defRPr sz="1575" b="1">
                 <a:solidFill>
-                  <a:srgbClr val="28534A"/>
+                  <a:srgbClr val="263C3A"/>
                 </a:solidFill>
-                <a:latin typeface="Arial"/>
-                <a:ea typeface="Arial"/>
-                <a:cs typeface="Arial"/>
+                <a:latin typeface="DejaVu Sans"/>
+                <a:ea typeface="DejaVu Sans"/>
+                <a:cs typeface="DejaVu Sans"/>
               </a:defRPr>
             </a:pPr>
             <a:r>
-              <a:rPr sz="1800" b="0">
+              <a:rPr sz="1575" b="1">
                 <a:solidFill>
-                  <a:srgbClr val="28534A"/>
+                  <a:srgbClr val="263C3A"/>
                 </a:solidFill>
-                <a:latin typeface="Arial"/>
-                <a:ea typeface="Arial"/>
-                <a:cs typeface="Arial"/>
+                <a:latin typeface="DejaVu Sans"/>
+                <a:ea typeface="DejaVu Sans"/>
+                <a:cs typeface="DejaVu Sans"/>
               </a:rPr>
-              <a:t>Time: [Add minutes]     Check: [Add your feedback routine]</a:t>
+              <a:t>02  Check and improve</a:t>
             </a:r>
           </a:p>
         </p:txBody>
       </p:sp>
       <p:sp>
         <p:nvSpPr>
-          <p:cNvPr id="7" name="">
+          <p:cNvPr id="6" name="">
             <a:extLst xmlns:a="http://schemas.openxmlformats.org/drawingml/2006/main">
               <a:ext uri="{FF2B5EF4-FFF2-40B4-BE49-F238E27FC236}">
-                <a16:creationId xmlns:a16="http://schemas.microsoft.com/office/drawing/2014/main" id="{C01FCC04-7FC5-4F5C-990F-4E5DFA72F3E8}"/>
+                <a16:creationId xmlns:a16="http://schemas.microsoft.com/office/drawing/2014/main" id="{7F2EFF3A-0DBC-447F-87E9-13FE1497A7BB}"/>
               </a:ext>
             </a:extLst>
           </p:cNvPr>
@@ -3269,8 +3100,70 @@
         </p:nvSpPr>
         <p:spPr>
           <a:xfrm xmlns:a="http://schemas.openxmlformats.org/drawingml/2006/main">
-            <a:off x="609600" y="6534150"/>
-            <a:ext cx="10972800" cy="209550"/>
+            <a:off x="609600" y="2247900"/>
+            <a:ext cx="5400675" cy="3371850"/>
+          </a:xfrm>
+          <a:prstGeom xmlns:a="http://schemas.openxmlformats.org/drawingml/2006/main" prst="rect">
+            <a:avLst/>
+          </a:prstGeom>
+          <a:solidFill xmlns:a="http://schemas.openxmlformats.org/drawingml/2006/main">
+            <a:srgbClr val="EDF2F5"/>
+          </a:solidFill>
+          <a:ln xmlns:a="http://schemas.openxmlformats.org/drawingml/2006/main" w="9525">
+            <a:solidFill>
+              <a:srgbClr val="D4DFDB"/>
+            </a:solidFill>
+          </a:ln>
+        </p:spPr>
+      </p:sp>
+      <p:sp>
+        <p:nvSpPr>
+          <p:cNvPr id="7" name="">
+            <a:extLst xmlns:a="http://schemas.openxmlformats.org/drawingml/2006/main">
+              <a:ext uri="{FF2B5EF4-FFF2-40B4-BE49-F238E27FC236}">
+                <a16:creationId xmlns:a16="http://schemas.microsoft.com/office/drawing/2014/main" id="{6E3740BF-25A6-4E25-9336-69916CFAEE7D}"/>
+              </a:ext>
+            </a:extLst>
+          </p:cNvPr>
+          <p:cNvSpPr>
+            <a:spLocks xmlns:a="http://schemas.openxmlformats.org/drawingml/2006/main" noGrp="1"/>
+          </p:cNvSpPr>
+          <p:nvPr/>
+        </p:nvSpPr>
+        <p:spPr>
+          <a:xfrm xmlns:a="http://schemas.openxmlformats.org/drawingml/2006/main">
+            <a:off x="800100" y="2419350"/>
+            <a:ext cx="381000" cy="381000"/>
+          </a:xfrm>
+          <a:prstGeom xmlns:a="http://schemas.openxmlformats.org/drawingml/2006/main" prst="ellipse">
+            <a:avLst/>
+          </a:prstGeom>
+          <a:solidFill xmlns:a="http://schemas.openxmlformats.org/drawingml/2006/main">
+            <a:srgbClr val="FFFFFF"/>
+          </a:solidFill>
+          <a:ln xmlns:a="http://schemas.openxmlformats.org/drawingml/2006/main" w="0">
+            <a:noFill/>
+          </a:ln>
+        </p:spPr>
+      </p:sp>
+      <p:sp>
+        <p:nvSpPr>
+          <p:cNvPr id="8" name="">
+            <a:extLst xmlns:a="http://schemas.openxmlformats.org/drawingml/2006/main">
+              <a:ext uri="{FF2B5EF4-FFF2-40B4-BE49-F238E27FC236}">
+                <a16:creationId xmlns:a16="http://schemas.microsoft.com/office/drawing/2014/main" id="{290835EB-4A33-4D0B-9204-79E2377234D7}"/>
+              </a:ext>
+            </a:extLst>
+          </p:cNvPr>
+          <p:cNvSpPr>
+            <a:spLocks xmlns:a="http://schemas.openxmlformats.org/drawingml/2006/main" noGrp="1"/>
+          </p:cNvSpPr>
+          <p:nvPr/>
+        </p:nvSpPr>
+        <p:spPr>
+          <a:xfrm xmlns:a="http://schemas.openxmlformats.org/drawingml/2006/main">
+            <a:off x="857250" y="2486025"/>
+            <a:ext cx="342900" cy="285750"/>
           </a:xfrm>
           <a:prstGeom xmlns:a="http://schemas.openxmlformats.org/drawingml/2006/main" prst="rect">
             <a:avLst/>
@@ -3287,33 +3180,524 @@
           <a:lstStyle xmlns:a="http://schemas.openxmlformats.org/drawingml/2006/main"/>
           <a:p xmlns:a="http://schemas.openxmlformats.org/drawingml/2006/main">
             <a:pPr>
-              <a:defRPr sz="1050" b="0">
+              <a:defRPr sz="1350" b="1">
                 <a:solidFill>
-                  <a:srgbClr val="62675C"/>
+                  <a:srgbClr val="263C3A"/>
                 </a:solidFill>
-                <a:latin typeface="Arial"/>
-                <a:ea typeface="Arial"/>
-                <a:cs typeface="Arial"/>
+                <a:latin typeface="DejaVu Sans"/>
+                <a:ea typeface="DejaVu Sans"/>
+                <a:cs typeface="DejaVu Sans"/>
               </a:defRPr>
             </a:pPr>
             <a:r>
-              <a:rPr sz="1050" b="0">
+              <a:rPr sz="1350" b="1">
                 <a:solidFill>
-                  <a:srgbClr val="62675C"/>
+                  <a:srgbClr val="263C3A"/>
                 </a:solidFill>
-                <a:latin typeface="Arial"/>
-                <a:ea typeface="Arial"/>
-                <a:cs typeface="Arial"/>
+                <a:latin typeface="DejaVu Sans"/>
+                <a:ea typeface="DejaVu Sans"/>
+                <a:cs typeface="DejaVu Sans"/>
               </a:rPr>
-              <a:t>TNT Teaching Tools   Editable classroom template   Source and teacher guidance in speaker notes</a:t>
+              <a:t>01</a:t>
             </a:r>
           </a:p>
         </p:txBody>
       </p:sp>
+      <p:sp>
+        <p:nvSpPr>
+          <p:cNvPr id="9" name="">
+            <a:extLst xmlns:a="http://schemas.openxmlformats.org/drawingml/2006/main">
+              <a:ext uri="{FF2B5EF4-FFF2-40B4-BE49-F238E27FC236}">
+                <a16:creationId xmlns:a16="http://schemas.microsoft.com/office/drawing/2014/main" id="{2AA30B31-D512-4D34-8AAE-5EA8495CDF2A}"/>
+              </a:ext>
+            </a:extLst>
+          </p:cNvPr>
+          <p:cNvSpPr>
+            <a:spLocks xmlns:a="http://schemas.openxmlformats.org/drawingml/2006/main" noGrp="1"/>
+          </p:cNvSpPr>
+          <p:nvPr/>
+        </p:nvSpPr>
+        <p:spPr>
+          <a:xfrm xmlns:a="http://schemas.openxmlformats.org/drawingml/2006/main">
+            <a:off x="1352550" y="2466975"/>
+            <a:ext cx="4467225" cy="428625"/>
+          </a:xfrm>
+          <a:prstGeom xmlns:a="http://schemas.openxmlformats.org/drawingml/2006/main" prst="rect">
+            <a:avLst/>
+          </a:prstGeom>
+          <a:noFill xmlns:a="http://schemas.openxmlformats.org/drawingml/2006/main"/>
+          <a:ln xmlns:a="http://schemas.openxmlformats.org/drawingml/2006/main" w="0">
+            <a:noFill/>
+          </a:ln>
+        </p:spPr>
+        <p:txBody>
+          <a:bodyPr xmlns:a="http://schemas.openxmlformats.org/drawingml/2006/main" lIns="0" tIns="0" rIns="0" bIns="0" anchor="t">
+            <a:noAutofit/>
+          </a:bodyPr>
+          <a:lstStyle xmlns:a="http://schemas.openxmlformats.org/drawingml/2006/main"/>
+          <a:p xmlns:a="http://schemas.openxmlformats.org/drawingml/2006/main">
+            <a:pPr>
+              <a:defRPr sz="1725" b="1">
+                <a:solidFill>
+                  <a:srgbClr val="263C3A"/>
+                </a:solidFill>
+                <a:latin typeface="DejaVu Sans"/>
+                <a:ea typeface="DejaVu Sans"/>
+                <a:cs typeface="DejaVu Sans"/>
+              </a:defRPr>
+            </a:pPr>
+            <a:r>
+              <a:rPr sz="1725" b="1">
+                <a:solidFill>
+                  <a:srgbClr val="263C3A"/>
+                </a:solidFill>
+                <a:latin typeface="DejaVu Sans"/>
+                <a:ea typeface="DejaVu Sans"/>
+                <a:cs typeface="DejaVu Sans"/>
+              </a:rPr>
+              <a:t>Prompt side</a:t>
+            </a:r>
+          </a:p>
+        </p:txBody>
+      </p:sp>
+      <p:sp>
+        <p:nvSpPr>
+          <p:cNvPr id="10" name="">
+            <a:extLst xmlns:a="http://schemas.openxmlformats.org/drawingml/2006/main">
+              <a:ext uri="{FF2B5EF4-FFF2-40B4-BE49-F238E27FC236}">
+                <a16:creationId xmlns:a16="http://schemas.microsoft.com/office/drawing/2014/main" id="{DF8FEBB6-1404-40DF-87F7-B19BB3B4C2A7}"/>
+              </a:ext>
+            </a:extLst>
+          </p:cNvPr>
+          <p:cNvSpPr>
+            <a:spLocks xmlns:a="http://schemas.openxmlformats.org/drawingml/2006/main" noGrp="1"/>
+          </p:cNvSpPr>
+          <p:nvPr/>
+        </p:nvSpPr>
+        <p:spPr>
+          <a:xfrm xmlns:a="http://schemas.openxmlformats.org/drawingml/2006/main">
+            <a:off x="819150" y="2990850"/>
+            <a:ext cx="4981575" cy="2466975"/>
+          </a:xfrm>
+          <a:prstGeom xmlns:a="http://schemas.openxmlformats.org/drawingml/2006/main" prst="rect">
+            <a:avLst/>
+          </a:prstGeom>
+          <a:noFill xmlns:a="http://schemas.openxmlformats.org/drawingml/2006/main"/>
+          <a:ln xmlns:a="http://schemas.openxmlformats.org/drawingml/2006/main" w="0">
+            <a:noFill/>
+          </a:ln>
+        </p:spPr>
+        <p:txBody>
+          <a:bodyPr xmlns:a="http://schemas.openxmlformats.org/drawingml/2006/main" lIns="0" tIns="0" rIns="0" bIns="0" anchor="t">
+            <a:noAutofit/>
+          </a:bodyPr>
+          <a:lstStyle xmlns:a="http://schemas.openxmlformats.org/drawingml/2006/main"/>
+          <a:p xmlns:a="http://schemas.openxmlformats.org/drawingml/2006/main">
+            <a:pPr>
+              <a:defRPr sz="1950" b="0">
+                <a:solidFill>
+                  <a:srgbClr val="687572"/>
+                </a:solidFill>
+                <a:latin typeface="DejaVu Sans"/>
+                <a:ea typeface="DejaVu Sans"/>
+                <a:cs typeface="DejaVu Sans"/>
+              </a:defRPr>
+            </a:pPr>
+            <a:r>
+              <a:rPr sz="1950" b="0">
+                <a:solidFill>
+                  <a:srgbClr val="687572"/>
+                </a:solidFill>
+                <a:latin typeface="DejaVu Sans"/>
+                <a:ea typeface="DejaVu Sans"/>
+                <a:cs typeface="DejaVu Sans"/>
+              </a:rPr>
+              <a:t>[Your prompt]</a:t>
+            </a:r>
+          </a:p>
+        </p:txBody>
+      </p:sp>
+      <p:sp>
+        <p:nvSpPr>
+          <p:cNvPr id="11" name="">
+            <a:extLst xmlns:a="http://schemas.openxmlformats.org/drawingml/2006/main">
+              <a:ext uri="{FF2B5EF4-FFF2-40B4-BE49-F238E27FC236}">
+                <a16:creationId xmlns:a16="http://schemas.microsoft.com/office/drawing/2014/main" id="{535890CD-15B5-4550-813E-0B183A76F43D}"/>
+              </a:ext>
+            </a:extLst>
+          </p:cNvPr>
+          <p:cNvSpPr>
+            <a:spLocks xmlns:a="http://schemas.openxmlformats.org/drawingml/2006/main" noGrp="1"/>
+          </p:cNvSpPr>
+          <p:nvPr/>
+        </p:nvSpPr>
+        <p:spPr>
+          <a:xfrm xmlns:a="http://schemas.openxmlformats.org/drawingml/2006/main">
+            <a:off x="6181725" y="2247900"/>
+            <a:ext cx="5400675" cy="3371850"/>
+          </a:xfrm>
+          <a:prstGeom xmlns:a="http://schemas.openxmlformats.org/drawingml/2006/main" prst="rect">
+            <a:avLst/>
+          </a:prstGeom>
+          <a:solidFill xmlns:a="http://schemas.openxmlformats.org/drawingml/2006/main">
+            <a:srgbClr val="EAF1EC"/>
+          </a:solidFill>
+          <a:ln xmlns:a="http://schemas.openxmlformats.org/drawingml/2006/main" w="9525">
+            <a:solidFill>
+              <a:srgbClr val="D4DFDB"/>
+            </a:solidFill>
+          </a:ln>
+        </p:spPr>
+      </p:sp>
+      <p:sp>
+        <p:nvSpPr>
+          <p:cNvPr id="12" name="">
+            <a:extLst xmlns:a="http://schemas.openxmlformats.org/drawingml/2006/main">
+              <a:ext uri="{FF2B5EF4-FFF2-40B4-BE49-F238E27FC236}">
+                <a16:creationId xmlns:a16="http://schemas.microsoft.com/office/drawing/2014/main" id="{A9711209-7CBD-4871-87D1-859E6864D122}"/>
+              </a:ext>
+            </a:extLst>
+          </p:cNvPr>
+          <p:cNvSpPr>
+            <a:spLocks xmlns:a="http://schemas.openxmlformats.org/drawingml/2006/main" noGrp="1"/>
+          </p:cNvSpPr>
+          <p:nvPr/>
+        </p:nvSpPr>
+        <p:spPr>
+          <a:xfrm xmlns:a="http://schemas.openxmlformats.org/drawingml/2006/main">
+            <a:off x="6372225" y="2419350"/>
+            <a:ext cx="381000" cy="381000"/>
+          </a:xfrm>
+          <a:prstGeom xmlns:a="http://schemas.openxmlformats.org/drawingml/2006/main" prst="ellipse">
+            <a:avLst/>
+          </a:prstGeom>
+          <a:solidFill xmlns:a="http://schemas.openxmlformats.org/drawingml/2006/main">
+            <a:srgbClr val="FFFFFF"/>
+          </a:solidFill>
+          <a:ln xmlns:a="http://schemas.openxmlformats.org/drawingml/2006/main" w="0">
+            <a:noFill/>
+          </a:ln>
+        </p:spPr>
+      </p:sp>
+      <p:sp>
+        <p:nvSpPr>
+          <p:cNvPr id="13" name="">
+            <a:extLst xmlns:a="http://schemas.openxmlformats.org/drawingml/2006/main">
+              <a:ext uri="{FF2B5EF4-FFF2-40B4-BE49-F238E27FC236}">
+                <a16:creationId xmlns:a16="http://schemas.microsoft.com/office/drawing/2014/main" id="{40BBC020-18EF-44B0-9C25-E0F560E5E374}"/>
+              </a:ext>
+            </a:extLst>
+          </p:cNvPr>
+          <p:cNvSpPr>
+            <a:spLocks xmlns:a="http://schemas.openxmlformats.org/drawingml/2006/main" noGrp="1"/>
+          </p:cNvSpPr>
+          <p:nvPr/>
+        </p:nvSpPr>
+        <p:spPr>
+          <a:xfrm xmlns:a="http://schemas.openxmlformats.org/drawingml/2006/main">
+            <a:off x="6429375" y="2486025"/>
+            <a:ext cx="342900" cy="285750"/>
+          </a:xfrm>
+          <a:prstGeom xmlns:a="http://schemas.openxmlformats.org/drawingml/2006/main" prst="rect">
+            <a:avLst/>
+          </a:prstGeom>
+          <a:noFill xmlns:a="http://schemas.openxmlformats.org/drawingml/2006/main"/>
+          <a:ln xmlns:a="http://schemas.openxmlformats.org/drawingml/2006/main" w="0">
+            <a:noFill/>
+          </a:ln>
+        </p:spPr>
+        <p:txBody>
+          <a:bodyPr xmlns:a="http://schemas.openxmlformats.org/drawingml/2006/main" lIns="0" tIns="0" rIns="0" bIns="0" anchor="t">
+            <a:noAutofit/>
+          </a:bodyPr>
+          <a:lstStyle xmlns:a="http://schemas.openxmlformats.org/drawingml/2006/main"/>
+          <a:p xmlns:a="http://schemas.openxmlformats.org/drawingml/2006/main">
+            <a:pPr>
+              <a:defRPr sz="1350" b="1">
+                <a:solidFill>
+                  <a:srgbClr val="263C3A"/>
+                </a:solidFill>
+                <a:latin typeface="DejaVu Sans"/>
+                <a:ea typeface="DejaVu Sans"/>
+                <a:cs typeface="DejaVu Sans"/>
+              </a:defRPr>
+            </a:pPr>
+            <a:r>
+              <a:rPr sz="1350" b="1">
+                <a:solidFill>
+                  <a:srgbClr val="263C3A"/>
+                </a:solidFill>
+                <a:latin typeface="DejaVu Sans"/>
+                <a:ea typeface="DejaVu Sans"/>
+                <a:cs typeface="DejaVu Sans"/>
+              </a:rPr>
+              <a:t>02</a:t>
+            </a:r>
+          </a:p>
+        </p:txBody>
+      </p:sp>
+      <p:sp>
+        <p:nvSpPr>
+          <p:cNvPr id="14" name="">
+            <a:extLst xmlns:a="http://schemas.openxmlformats.org/drawingml/2006/main">
+              <a:ext uri="{FF2B5EF4-FFF2-40B4-BE49-F238E27FC236}">
+                <a16:creationId xmlns:a16="http://schemas.microsoft.com/office/drawing/2014/main" id="{394EB88C-4A3B-4C61-B3CA-03A94D3EB2EC}"/>
+              </a:ext>
+            </a:extLst>
+          </p:cNvPr>
+          <p:cNvSpPr>
+            <a:spLocks xmlns:a="http://schemas.openxmlformats.org/drawingml/2006/main" noGrp="1"/>
+          </p:cNvSpPr>
+          <p:nvPr/>
+        </p:nvSpPr>
+        <p:spPr>
+          <a:xfrm xmlns:a="http://schemas.openxmlformats.org/drawingml/2006/main">
+            <a:off x="6924675" y="2466975"/>
+            <a:ext cx="4467225" cy="428625"/>
+          </a:xfrm>
+          <a:prstGeom xmlns:a="http://schemas.openxmlformats.org/drawingml/2006/main" prst="rect">
+            <a:avLst/>
+          </a:prstGeom>
+          <a:noFill xmlns:a="http://schemas.openxmlformats.org/drawingml/2006/main"/>
+          <a:ln xmlns:a="http://schemas.openxmlformats.org/drawingml/2006/main" w="0">
+            <a:noFill/>
+          </a:ln>
+        </p:spPr>
+        <p:txBody>
+          <a:bodyPr xmlns:a="http://schemas.openxmlformats.org/drawingml/2006/main" lIns="0" tIns="0" rIns="0" bIns="0" anchor="t">
+            <a:noAutofit/>
+          </a:bodyPr>
+          <a:lstStyle xmlns:a="http://schemas.openxmlformats.org/drawingml/2006/main"/>
+          <a:p xmlns:a="http://schemas.openxmlformats.org/drawingml/2006/main">
+            <a:pPr>
+              <a:defRPr sz="1725" b="1">
+                <a:solidFill>
+                  <a:srgbClr val="263C3A"/>
+                </a:solidFill>
+                <a:latin typeface="DejaVu Sans"/>
+                <a:ea typeface="DejaVu Sans"/>
+                <a:cs typeface="DejaVu Sans"/>
+              </a:defRPr>
+            </a:pPr>
+            <a:r>
+              <a:rPr sz="1725" b="1">
+                <a:solidFill>
+                  <a:srgbClr val="263C3A"/>
+                </a:solidFill>
+                <a:latin typeface="DejaVu Sans"/>
+                <a:ea typeface="DejaVu Sans"/>
+                <a:cs typeface="DejaVu Sans"/>
+              </a:rPr>
+              <a:t>Answer side</a:t>
+            </a:r>
+          </a:p>
+        </p:txBody>
+      </p:sp>
+      <p:sp>
+        <p:nvSpPr>
+          <p:cNvPr id="15" name="">
+            <a:extLst xmlns:a="http://schemas.openxmlformats.org/drawingml/2006/main">
+              <a:ext uri="{FF2B5EF4-FFF2-40B4-BE49-F238E27FC236}">
+                <a16:creationId xmlns:a16="http://schemas.microsoft.com/office/drawing/2014/main" id="{BF91A32A-4DE3-44B4-9DFE-B040D806F11C}"/>
+              </a:ext>
+            </a:extLst>
+          </p:cNvPr>
+          <p:cNvSpPr>
+            <a:spLocks xmlns:a="http://schemas.openxmlformats.org/drawingml/2006/main" noGrp="1"/>
+          </p:cNvSpPr>
+          <p:nvPr/>
+        </p:nvSpPr>
+        <p:spPr>
+          <a:xfrm xmlns:a="http://schemas.openxmlformats.org/drawingml/2006/main">
+            <a:off x="6391275" y="2990850"/>
+            <a:ext cx="4981575" cy="2466975"/>
+          </a:xfrm>
+          <a:prstGeom xmlns:a="http://schemas.openxmlformats.org/drawingml/2006/main" prst="rect">
+            <a:avLst/>
+          </a:prstGeom>
+          <a:noFill xmlns:a="http://schemas.openxmlformats.org/drawingml/2006/main"/>
+          <a:ln xmlns:a="http://schemas.openxmlformats.org/drawingml/2006/main" w="0">
+            <a:noFill/>
+          </a:ln>
+        </p:spPr>
+        <p:txBody>
+          <a:bodyPr xmlns:a="http://schemas.openxmlformats.org/drawingml/2006/main" lIns="0" tIns="0" rIns="0" bIns="0" anchor="t">
+            <a:noAutofit/>
+          </a:bodyPr>
+          <a:lstStyle xmlns:a="http://schemas.openxmlformats.org/drawingml/2006/main"/>
+          <a:p xmlns:a="http://schemas.openxmlformats.org/drawingml/2006/main">
+            <a:pPr>
+              <a:defRPr sz="1950" b="0">
+                <a:solidFill>
+                  <a:srgbClr val="687572"/>
+                </a:solidFill>
+                <a:latin typeface="DejaVu Sans"/>
+                <a:ea typeface="DejaVu Sans"/>
+                <a:cs typeface="DejaVu Sans"/>
+              </a:defRPr>
+            </a:pPr>
+            <a:r>
+              <a:rPr sz="1950" b="0">
+                <a:solidFill>
+                  <a:srgbClr val="687572"/>
+                </a:solidFill>
+                <a:latin typeface="DejaVu Sans"/>
+                <a:ea typeface="DejaVu Sans"/>
+                <a:cs typeface="DejaVu Sans"/>
+              </a:rPr>
+              <a:t>[Your checked answer]</a:t>
+            </a:r>
+          </a:p>
+        </p:txBody>
+      </p:sp>
+      <p:sp>
+        <p:nvSpPr>
+          <p:cNvPr id="16" name="">
+            <a:extLst xmlns:a="http://schemas.openxmlformats.org/drawingml/2006/main">
+              <a:ext uri="{FF2B5EF4-FFF2-40B4-BE49-F238E27FC236}">
+                <a16:creationId xmlns:a16="http://schemas.microsoft.com/office/drawing/2014/main" id="{D2F61413-CCF8-4D83-BFF1-82E19B85196B}"/>
+              </a:ext>
+            </a:extLst>
+          </p:cNvPr>
+          <p:cNvSpPr>
+            <a:spLocks xmlns:a="http://schemas.openxmlformats.org/drawingml/2006/main" noGrp="1"/>
+          </p:cNvSpPr>
+          <p:nvPr/>
+        </p:nvSpPr>
+        <p:spPr>
+          <a:xfrm xmlns:a="http://schemas.openxmlformats.org/drawingml/2006/main">
+            <a:off x="609600" y="5953125"/>
+            <a:ext cx="10972800" cy="9525"/>
+          </a:xfrm>
+          <a:prstGeom xmlns:a="http://schemas.openxmlformats.org/drawingml/2006/main" prst="rect">
+            <a:avLst/>
+          </a:prstGeom>
+          <a:solidFill xmlns:a="http://schemas.openxmlformats.org/drawingml/2006/main">
+            <a:srgbClr val="A9BDB7"/>
+          </a:solidFill>
+          <a:ln xmlns:a="http://schemas.openxmlformats.org/drawingml/2006/main" w="0">
+            <a:noFill/>
+          </a:ln>
+        </p:spPr>
+      </p:sp>
+      <p:sp>
+        <p:nvSpPr>
+          <p:cNvPr id="17" name="">
+            <a:extLst xmlns:a="http://schemas.openxmlformats.org/drawingml/2006/main">
+              <a:ext uri="{FF2B5EF4-FFF2-40B4-BE49-F238E27FC236}">
+                <a16:creationId xmlns:a16="http://schemas.microsoft.com/office/drawing/2014/main" id="{D2373648-856F-4CDA-A517-95E8FEE23863}"/>
+              </a:ext>
+            </a:extLst>
+          </p:cNvPr>
+          <p:cNvSpPr>
+            <a:spLocks xmlns:a="http://schemas.openxmlformats.org/drawingml/2006/main" noGrp="1"/>
+          </p:cNvSpPr>
+          <p:nvPr/>
+        </p:nvSpPr>
+        <p:spPr>
+          <a:xfrm xmlns:a="http://schemas.openxmlformats.org/drawingml/2006/main">
+            <a:off x="609600" y="6191250"/>
+            <a:ext cx="3238500" cy="361950"/>
+          </a:xfrm>
+          <a:prstGeom xmlns:a="http://schemas.openxmlformats.org/drawingml/2006/main" prst="rect">
+            <a:avLst/>
+          </a:prstGeom>
+          <a:noFill xmlns:a="http://schemas.openxmlformats.org/drawingml/2006/main"/>
+          <a:ln xmlns:a="http://schemas.openxmlformats.org/drawingml/2006/main" w="0">
+            <a:noFill/>
+          </a:ln>
+        </p:spPr>
+        <p:txBody>
+          <a:bodyPr xmlns:a="http://schemas.openxmlformats.org/drawingml/2006/main" lIns="0" tIns="0" rIns="0" bIns="0" anchor="t">
+            <a:noAutofit/>
+          </a:bodyPr>
+          <a:lstStyle xmlns:a="http://schemas.openxmlformats.org/drawingml/2006/main"/>
+          <a:p xmlns:a="http://schemas.openxmlformats.org/drawingml/2006/main">
+            <a:pPr>
+              <a:defRPr sz="1650" b="0">
+                <a:solidFill>
+                  <a:srgbClr val="687572"/>
+                </a:solidFill>
+                <a:latin typeface="DejaVu Sans"/>
+                <a:ea typeface="DejaVu Sans"/>
+                <a:cs typeface="DejaVu Sans"/>
+              </a:defRPr>
+            </a:pPr>
+            <a:r>
+              <a:rPr sz="1650" b="0">
+                <a:solidFill>
+                  <a:srgbClr val="687572"/>
+                </a:solidFill>
+                <a:latin typeface="DejaVu Sans"/>
+                <a:ea typeface="DejaVu Sans"/>
+                <a:cs typeface="DejaVu Sans"/>
+              </a:rPr>
+              <a:t>Time: [Minutes]</a:t>
+            </a:r>
+          </a:p>
+        </p:txBody>
+      </p:sp>
+      <p:sp>
+        <p:nvSpPr>
+          <p:cNvPr id="18" name="">
+            <a:extLst xmlns:a="http://schemas.openxmlformats.org/drawingml/2006/main">
+              <a:ext uri="{FF2B5EF4-FFF2-40B4-BE49-F238E27FC236}">
+                <a16:creationId xmlns:a16="http://schemas.microsoft.com/office/drawing/2014/main" id="{B4EC24B7-7186-4204-906E-7439E1B03D0D}"/>
+              </a:ext>
+            </a:extLst>
+          </p:cNvPr>
+          <p:cNvSpPr>
+            <a:spLocks xmlns:a="http://schemas.openxmlformats.org/drawingml/2006/main" noGrp="1"/>
+          </p:cNvSpPr>
+          <p:nvPr/>
+        </p:nvSpPr>
+        <p:spPr>
+          <a:xfrm xmlns:a="http://schemas.openxmlformats.org/drawingml/2006/main">
+            <a:off x="4286250" y="6191250"/>
+            <a:ext cx="7296150" cy="361950"/>
+          </a:xfrm>
+          <a:prstGeom xmlns:a="http://schemas.openxmlformats.org/drawingml/2006/main" prst="rect">
+            <a:avLst/>
+          </a:prstGeom>
+          <a:noFill xmlns:a="http://schemas.openxmlformats.org/drawingml/2006/main"/>
+          <a:ln xmlns:a="http://schemas.openxmlformats.org/drawingml/2006/main" w="0">
+            <a:noFill/>
+          </a:ln>
+        </p:spPr>
+        <p:txBody>
+          <a:bodyPr xmlns:a="http://schemas.openxmlformats.org/drawingml/2006/main" lIns="0" tIns="0" rIns="0" bIns="0" anchor="t">
+            <a:noAutofit/>
+          </a:bodyPr>
+          <a:lstStyle xmlns:a="http://schemas.openxmlformats.org/drawingml/2006/main"/>
+          <a:p xmlns:a="http://schemas.openxmlformats.org/drawingml/2006/main">
+            <a:pPr>
+              <a:defRPr sz="1650" b="0">
+                <a:solidFill>
+                  <a:srgbClr val="687572"/>
+                </a:solidFill>
+                <a:latin typeface="DejaVu Sans"/>
+                <a:ea typeface="DejaVu Sans"/>
+                <a:cs typeface="DejaVu Sans"/>
+              </a:defRPr>
+            </a:pPr>
+            <a:r>
+              <a:rPr sz="1650" b="0">
+                <a:solidFill>
+                  <a:srgbClr val="687572"/>
+                </a:solidFill>
+                <a:latin typeface="DejaVu Sans"/>
+                <a:ea typeface="DejaVu Sans"/>
+                <a:cs typeface="DejaVu Sans"/>
+              </a:rPr>
+              <a:t>Feedback: [Your checking routine]</a:t>
+            </a:r>
+          </a:p>
+        </p:txBody>
+      </p:sp>
     </p:spTree>
     <p:extLst>
       <p:ext uri="{BB962C8B-B14F-4D97-AF65-F5344CB8AC3E}">
-        <p14:creationId xmlns:p14="http://schemas.microsoft.com/office/powerpoint/2010/main" val="1778528114"/>
+        <p14:creationId xmlns:p14="http://schemas.microsoft.com/office/powerpoint/2010/main" val="633867263"/>
       </p:ext>
     </p:extLst>
   </p:cSld>
